--- a/apps/resources/bundled_files/5-klass-ondu-kobeytuu-boluu-sabak.pptx
+++ b/apps/resources/bundled_files/5-klass-ondu-kobeytuu-boluu-sabak.pptx
@@ -5196,7 +5196,7 @@
                 </a:solidFill>
                 <a:latin typeface="PT Sans"/>
               </a:rPr>
-              <a:t>5-класс · Математика</a:t>
+              <a:t/>
             </a:r>
           </a:p>
         </p:txBody>
@@ -5688,7 +5688,7 @@
                 </a:solidFill>
                 <a:latin typeface="PT Sans"/>
               </a:rPr>
-              <a:t>5-класс ›</a:t>
+              <a:t/>
             </a:r>
           </a:p>
           <a:p>
@@ -6637,7 +6637,7 @@
                 </a:solidFill>
                 <a:latin typeface="PT Sans"/>
               </a:rPr>
-              <a:t>5-класс ›</a:t>
+              <a:t/>
             </a:r>
           </a:p>
           <a:p>
@@ -13989,7 +13989,7 @@
                 </a:solidFill>
                 <a:latin typeface="PT Sans"/>
               </a:rPr>
-              <a:t>5-класс ›</a:t>
+              <a:t/>
             </a:r>
           </a:p>
           <a:p>
@@ -16930,7 +16930,7 @@
                 </a:solidFill>
                 <a:latin typeface="PT Sans"/>
               </a:rPr>
-              <a:t>5-класс ›</a:t>
+              <a:t/>
             </a:r>
           </a:p>
           <a:p>
@@ -18513,7 +18513,7 @@
                 </a:solidFill>
                 <a:latin typeface="PT Sans"/>
               </a:rPr>
-              <a:t>5-класс ›</a:t>
+              <a:t/>
             </a:r>
           </a:p>
           <a:p>
@@ -19342,7 +19342,7 @@
                 </a:solidFill>
                 <a:latin typeface="PT Sans"/>
               </a:rPr>
-              <a:t>5-класс ›</a:t>
+              <a:t/>
             </a:r>
           </a:p>
           <a:p>
@@ -20132,7 +20132,7 @@
                 </a:solidFill>
                 <a:latin typeface="PT Sans"/>
               </a:rPr>
-              <a:t>5-класс ›</a:t>
+              <a:t/>
             </a:r>
           </a:p>
           <a:p>
@@ -21759,7 +21759,7 @@
                 </a:solidFill>
                 <a:latin typeface="PT Sans"/>
               </a:rPr>
-              <a:t>5-класс ›</a:t>
+              <a:t/>
             </a:r>
           </a:p>
           <a:p>
@@ -22843,7 +22843,7 @@
                 </a:solidFill>
                 <a:latin typeface="PT Sans"/>
               </a:rPr>
-              <a:t>5-класс ›</a:t>
+              <a:t/>
             </a:r>
           </a:p>
           <a:p>
@@ -24373,7 +24373,7 @@
                 </a:solidFill>
                 <a:latin typeface="PT Sans"/>
               </a:rPr>
-              <a:t>5-класс ›</a:t>
+              <a:t/>
             </a:r>
           </a:p>
           <a:p>
@@ -26494,7 +26494,7 @@
                 </a:solidFill>
                 <a:latin typeface="PT Sans"/>
               </a:rPr>
-              <a:t>5-класс ›</a:t>
+              <a:t/>
             </a:r>
           </a:p>
           <a:p>
@@ -27771,7 +27771,7 @@
                 </a:solidFill>
                 <a:latin typeface="PT Sans"/>
               </a:rPr>
-              <a:t>5-класс ›</a:t>
+              <a:t/>
             </a:r>
           </a:p>
           <a:p>
@@ -29199,7 +29199,7 @@
                 </a:solidFill>
                 <a:latin typeface="PT Sans"/>
               </a:rPr>
-              <a:t>5-класс ›</a:t>
+              <a:t/>
             </a:r>
           </a:p>
           <a:p>
@@ -30655,7 +30655,7 @@
                 </a:solidFill>
                 <a:latin typeface="PT Sans"/>
               </a:rPr>
-              <a:t>5-класс ›</a:t>
+              <a:t/>
             </a:r>
           </a:p>
           <a:p>
@@ -31960,7 +31960,7 @@
                 </a:solidFill>
                 <a:latin typeface="PT Sans"/>
               </a:rPr>
-              <a:t>5-класс ›</a:t>
+              <a:t/>
             </a:r>
           </a:p>
           <a:p>
@@ -32760,7 +32760,7 @@
                 </a:solidFill>
                 <a:latin typeface="PT Sans"/>
               </a:rPr>
-              <a:t>5-класс ›</a:t>
+              <a:t/>
             </a:r>
           </a:p>
           <a:p>
@@ -33601,7 +33601,7 @@
                 </a:solidFill>
                 <a:latin typeface="PT Sans"/>
               </a:rPr>
-              <a:t>5-класс ›</a:t>
+              <a:t/>
             </a:r>
           </a:p>
           <a:p>
@@ -34550,7 +34550,7 @@
                 </a:solidFill>
                 <a:latin typeface="PT Sans"/>
               </a:rPr>
-              <a:t>5-класс ›</a:t>
+              <a:t/>
             </a:r>
           </a:p>
           <a:p>
@@ -36004,7 +36004,7 @@
                 </a:solidFill>
                 <a:latin typeface="PT Sans"/>
               </a:rPr>
-              <a:t>5-класс ›</a:t>
+              <a:t/>
             </a:r>
           </a:p>
           <a:p>
@@ -36750,7 +36750,7 @@
                 </a:solidFill>
                 <a:latin typeface="PT Sans"/>
               </a:rPr>
-              <a:t>5-класс ›</a:t>
+              <a:t/>
             </a:r>
           </a:p>
           <a:p>
@@ -37558,7 +37558,7 @@
                 </a:solidFill>
                 <a:latin typeface="PT Sans"/>
               </a:rPr>
-              <a:t>5-класс ›</a:t>
+              <a:t/>
             </a:r>
           </a:p>
           <a:p>
@@ -38749,7 +38749,7 @@
                 </a:solidFill>
                 <a:latin typeface="PT Sans"/>
               </a:rPr>
-              <a:t>5-класс ›</a:t>
+              <a:t/>
             </a:r>
           </a:p>
           <a:p>
@@ -39928,7 +39928,7 @@
                 </a:solidFill>
                 <a:latin typeface="PT Sans"/>
               </a:rPr>
-              <a:t>5-класс ›</a:t>
+              <a:t/>
             </a:r>
           </a:p>
           <a:p>
@@ -40109,7 +40109,7 @@
                 </a:solidFill>
                 <a:latin typeface="PT Sans"/>
               </a:rPr>
-              <a:t>4-класс</a:t>
+              <a:t/>
             </a:r>
           </a:p>
         </p:txBody>
@@ -40289,7 +40289,7 @@
                 </a:solidFill>
                 <a:latin typeface="PT Sans"/>
               </a:rPr>
-              <a:t>5-класс</a:t>
+              <a:t/>
             </a:r>
           </a:p>
         </p:txBody>
@@ -40469,7 +40469,7 @@
                 </a:solidFill>
                 <a:latin typeface="PT Sans"/>
               </a:rPr>
-              <a:t>5-класс</a:t>
+              <a:t/>
             </a:r>
           </a:p>
         </p:txBody>
@@ -40705,7 +40705,7 @@
                 </a:solidFill>
                 <a:latin typeface="PT Sans"/>
               </a:rPr>
-              <a:t>6-класс</a:t>
+              <a:t/>
             </a:r>
           </a:p>
         </p:txBody>
@@ -41125,7 +41125,7 @@
                 </a:solidFill>
                 <a:latin typeface="PT Sans"/>
               </a:rPr>
-              <a:t>5-класс ›</a:t>
+              <a:t/>
             </a:r>
           </a:p>
           <a:p>
@@ -42273,7 +42273,7 @@
                 </a:solidFill>
                 <a:latin typeface="PT Sans"/>
               </a:rPr>
-              <a:t>5-класс ›</a:t>
+              <a:t/>
             </a:r>
           </a:p>
           <a:p>

--- a/apps/resources/bundled_files/5-klass-ondu-kobeytuu-boluu-sabak.pptx
+++ b/apps/resources/bundled_files/5-klass-ondu-kobeytuu-boluu-sabak.pptx
@@ -1582,7 +1582,7 @@
           <a:lstStyle/>
           <a:p>
             <a:r>
-              <a:t>Ой жүгүртүү маданияты (Wenxi Lee, 2.6).</a:t>
+              <a:t>Ой жүгүртүү маданияты (Wenxi Lee, 2,6).</a:t>
             </a:r>
           </a:p>
         </p:txBody>
